--- a/livro_ia_educacao/saida/pptx/Cap07_slides.pptx
+++ b/livro_ia_educacao/saida/pptx/Cap07_slides.pptx
@@ -8773,11 +8773,11 @@
         <p:spPr>
           <a:xfrm>
             <a:off x="548640" y="1417320"/>
-            <a:ext cx="11064240" cy="762000"/>
+            <a:ext cx="11064240" cy="682752"/>
           </a:xfrm>
           <a:prstGeom prst="roundRect">
             <a:avLst>
-              <a:gd name="adj" fmla="val 14400"/>
+              <a:gd name="adj" fmla="val 16071"/>
             </a:avLst>
           </a:prstGeom>
           <a:solidFill>
@@ -8804,7 +8804,7 @@
         <p:spPr>
           <a:xfrm>
             <a:off x="731520" y="1417320"/>
-            <a:ext cx="548640" cy="762000"/>
+            <a:ext cx="548640" cy="682752"/>
           </a:xfrm>
           <a:prstGeom prst="rect">
             <a:avLst/>
@@ -8840,7 +8840,7 @@
         <p:spPr>
           <a:xfrm>
             <a:off x="1463040" y="1417320"/>
-            <a:ext cx="9966960" cy="762000"/>
+            <a:ext cx="9966960" cy="682752"/>
           </a:xfrm>
           <a:prstGeom prst="rect">
             <a:avLst/>
@@ -8875,12 +8875,12 @@
         </p:nvSpPr>
         <p:spPr>
           <a:xfrm>
-            <a:off x="548640" y="2289048"/>
-            <a:ext cx="11064240" cy="762000"/>
+            <a:off x="548640" y="2209800"/>
+            <a:ext cx="11064240" cy="682752"/>
           </a:xfrm>
           <a:prstGeom prst="roundRect">
             <a:avLst>
-              <a:gd name="adj" fmla="val 14400"/>
+              <a:gd name="adj" fmla="val 16071"/>
             </a:avLst>
           </a:prstGeom>
           <a:solidFill>
@@ -8906,8 +8906,8 @@
         </p:nvSpPr>
         <p:spPr>
           <a:xfrm>
-            <a:off x="731520" y="2289048"/>
-            <a:ext cx="548640" cy="762000"/>
+            <a:off x="731520" y="2209800"/>
+            <a:ext cx="548640" cy="682752"/>
           </a:xfrm>
           <a:prstGeom prst="rect">
             <a:avLst/>
@@ -8942,8 +8942,8 @@
         </p:nvSpPr>
         <p:spPr>
           <a:xfrm>
-            <a:off x="1463040" y="2289048"/>
-            <a:ext cx="9966960" cy="762000"/>
+            <a:off x="1463040" y="2209800"/>
+            <a:ext cx="9966960" cy="682752"/>
           </a:xfrm>
           <a:prstGeom prst="rect">
             <a:avLst/>
@@ -8978,12 +8978,12 @@
         </p:nvSpPr>
         <p:spPr>
           <a:xfrm>
-            <a:off x="548640" y="3160776"/>
-            <a:ext cx="11064240" cy="762000"/>
+            <a:off x="548640" y="3002280"/>
+            <a:ext cx="11064240" cy="682752"/>
           </a:xfrm>
           <a:prstGeom prst="roundRect">
             <a:avLst>
-              <a:gd name="adj" fmla="val 14400"/>
+              <a:gd name="adj" fmla="val 16071"/>
             </a:avLst>
           </a:prstGeom>
           <a:solidFill>
@@ -9009,8 +9009,8 @@
         </p:nvSpPr>
         <p:spPr>
           <a:xfrm>
-            <a:off x="731520" y="3160776"/>
-            <a:ext cx="548640" cy="762000"/>
+            <a:off x="731520" y="3002280"/>
+            <a:ext cx="548640" cy="682752"/>
           </a:xfrm>
           <a:prstGeom prst="rect">
             <a:avLst/>
@@ -9045,8 +9045,8 @@
         </p:nvSpPr>
         <p:spPr>
           <a:xfrm>
-            <a:off x="1463040" y="3160776"/>
-            <a:ext cx="9966960" cy="762000"/>
+            <a:off x="1463040" y="3002280"/>
+            <a:ext cx="9966960" cy="682752"/>
           </a:xfrm>
           <a:prstGeom prst="rect">
             <a:avLst/>
@@ -9081,12 +9081,12 @@
         </p:nvSpPr>
         <p:spPr>
           <a:xfrm>
-            <a:off x="548640" y="4032504"/>
-            <a:ext cx="11064240" cy="762000"/>
+            <a:off x="548640" y="3794760"/>
+            <a:ext cx="11064240" cy="682752"/>
           </a:xfrm>
           <a:prstGeom prst="roundRect">
             <a:avLst>
-              <a:gd name="adj" fmla="val 14400"/>
+              <a:gd name="adj" fmla="val 16071"/>
             </a:avLst>
           </a:prstGeom>
           <a:solidFill>
@@ -9112,8 +9112,8 @@
         </p:nvSpPr>
         <p:spPr>
           <a:xfrm>
-            <a:off x="731520" y="4032504"/>
-            <a:ext cx="548640" cy="762000"/>
+            <a:off x="731520" y="3794760"/>
+            <a:ext cx="548640" cy="682752"/>
           </a:xfrm>
           <a:prstGeom prst="rect">
             <a:avLst/>
@@ -9148,8 +9148,8 @@
         </p:nvSpPr>
         <p:spPr>
           <a:xfrm>
-            <a:off x="1463040" y="4032504"/>
-            <a:ext cx="9966960" cy="762000"/>
+            <a:off x="1463040" y="3794760"/>
+            <a:ext cx="9966960" cy="682752"/>
           </a:xfrm>
           <a:prstGeom prst="rect">
             <a:avLst/>
@@ -9184,12 +9184,12 @@
         </p:nvSpPr>
         <p:spPr>
           <a:xfrm>
-            <a:off x="548640" y="4904232"/>
-            <a:ext cx="11064240" cy="762000"/>
+            <a:off x="548640" y="4587240"/>
+            <a:ext cx="11064240" cy="682752"/>
           </a:xfrm>
           <a:prstGeom prst="roundRect">
             <a:avLst>
-              <a:gd name="adj" fmla="val 14400"/>
+              <a:gd name="adj" fmla="val 16071"/>
             </a:avLst>
           </a:prstGeom>
           <a:solidFill>
@@ -9215,8 +9215,8 @@
         </p:nvSpPr>
         <p:spPr>
           <a:xfrm>
-            <a:off x="731520" y="4904232"/>
-            <a:ext cx="548640" cy="762000"/>
+            <a:off x="731520" y="4587240"/>
+            <a:ext cx="548640" cy="682752"/>
           </a:xfrm>
           <a:prstGeom prst="rect">
             <a:avLst/>
@@ -9251,8 +9251,8 @@
         </p:nvSpPr>
         <p:spPr>
           <a:xfrm>
-            <a:off x="1463040" y="4904232"/>
-            <a:ext cx="9966960" cy="762000"/>
+            <a:off x="1463040" y="4587240"/>
+            <a:ext cx="9966960" cy="682752"/>
           </a:xfrm>
           <a:prstGeom prst="rect">
             <a:avLst/>
@@ -9287,12 +9287,12 @@
         </p:nvSpPr>
         <p:spPr>
           <a:xfrm>
-            <a:off x="548640" y="5775960"/>
-            <a:ext cx="11064240" cy="762000"/>
+            <a:off x="548640" y="5379720"/>
+            <a:ext cx="11064240" cy="682752"/>
           </a:xfrm>
           <a:prstGeom prst="roundRect">
             <a:avLst>
-              <a:gd name="adj" fmla="val 14400"/>
+              <a:gd name="adj" fmla="val 16071"/>
             </a:avLst>
           </a:prstGeom>
           <a:solidFill>
@@ -9318,8 +9318,8 @@
         </p:nvSpPr>
         <p:spPr>
           <a:xfrm>
-            <a:off x="731520" y="5775960"/>
-            <a:ext cx="548640" cy="762000"/>
+            <a:off x="731520" y="5379720"/>
+            <a:ext cx="548640" cy="682752"/>
           </a:xfrm>
           <a:prstGeom prst="rect">
             <a:avLst/>
@@ -9354,8 +9354,8 @@
         </p:nvSpPr>
         <p:spPr>
           <a:xfrm>
-            <a:off x="1463040" y="5775960"/>
-            <a:ext cx="9966960" cy="762000"/>
+            <a:off x="1463040" y="5379720"/>
+            <a:ext cx="9966960" cy="682752"/>
           </a:xfrm>
           <a:prstGeom prst="rect">
             <a:avLst/>
